--- a/inbox/Application Aware Networking/Vol_VII_Book_05_FedAAN_ServiceNow_Compliance_App.pptx
+++ b/inbox/Application Aware Networking/Vol_VII_Book_05_FedAAN_ServiceNow_Compliance_App.pptx
@@ -808,7 +808,7 @@
           <a:lstStyle/>
           <a:p>
             <a:r>
-              <a:t>Step two wires the in-boundary connectors. Under GCC Moderate the Graph and ARM callouts resolve to the commercial endpoints that serve that boundary (ADR-033); GCC High and DoD are not offered.</a:t>
+              <a:t>Step two wires the in-boundary connectors. Under GCC Moderate the Graph and ARM callouts resolve to the commercial endpoints that serve that boundary; GCC High and DoD are not offered.</a:t>
             </a:r>
           </a:p>
           <a:p/>
@@ -4877,7 +4877,7 @@
                 </a:solidFill>
                 <a:latin typeface="Arial"/>
               </a:rPr>
-              <a:t>Date Code: 2026-07-12 15:00 ET</a:t>
+              <a:t>Date Code: 2026-07-14 11:56 ET</a:t>
             </a:r>
           </a:p>
         </p:txBody>
@@ -5065,7 +5065,7 @@
                 </a:solidFill>
                 <a:latin typeface="Arial"/>
               </a:rPr>
-              <a:t>The ServiceNow Compliance App · Date Code: 2026-07-12 15:00 ET</a:t>
+              <a:t>The ServiceNow Compliance App · Date Code: 2026-07-14 11:56 ET</a:t>
             </a:r>
           </a:p>
         </p:txBody>
@@ -5288,7 +5288,7 @@
                 </a:solidFill>
                 <a:latin typeface="Arial"/>
               </a:rPr>
-              <a:t>The ServiceNow Compliance App · Date Code: 2026-07-12 15:00 ET</a:t>
+              <a:t>The ServiceNow Compliance App · Date Code: 2026-07-14 11:56 ET</a:t>
             </a:r>
           </a:p>
         </p:txBody>
@@ -6195,7 +6195,7 @@
                 </a:solidFill>
                 <a:latin typeface="Arial"/>
               </a:rPr>
-              <a:t>The ServiceNow Compliance App · Date Code: 2026-07-12 15:00 ET</a:t>
+              <a:t>The ServiceNow Compliance App · Date Code: 2026-07-14 11:56 ET</a:t>
             </a:r>
           </a:p>
         </p:txBody>
@@ -7189,7 +7189,7 @@
                 </a:solidFill>
                 <a:latin typeface="Arial"/>
               </a:rPr>
-              <a:t>The ServiceNow Compliance App · Date Code: 2026-07-12 15:00 ET</a:t>
+              <a:t>The ServiceNow Compliance App · Date Code: 2026-07-14 11:56 ET</a:t>
             </a:r>
           </a:p>
         </p:txBody>
@@ -8183,7 +8183,7 @@
                 </a:solidFill>
                 <a:latin typeface="Arial"/>
               </a:rPr>
-              <a:t>The ServiceNow Compliance App · Date Code: 2026-07-12 15:00 ET</a:t>
+              <a:t>The ServiceNow Compliance App · Date Code: 2026-07-14 11:56 ET</a:t>
             </a:r>
           </a:p>
         </p:txBody>
@@ -9177,7 +9177,7 @@
                 </a:solidFill>
                 <a:latin typeface="Arial"/>
               </a:rPr>
-              <a:t>The ServiceNow Compliance App · Date Code: 2026-07-12 15:00 ET</a:t>
+              <a:t>The ServiceNow Compliance App · Date Code: 2026-07-14 11:56 ET</a:t>
             </a:r>
           </a:p>
         </p:txBody>
@@ -10171,7 +10171,7 @@
                 </a:solidFill>
                 <a:latin typeface="Arial"/>
               </a:rPr>
-              <a:t>The ServiceNow Compliance App · Date Code: 2026-07-12 15:00 ET</a:t>
+              <a:t>The ServiceNow Compliance App · Date Code: 2026-07-14 11:56 ET</a:t>
             </a:r>
           </a:p>
         </p:txBody>
@@ -10829,7 +10829,7 @@
                 </a:solidFill>
                 <a:latin typeface="Arial"/>
               </a:rPr>
-              <a:t>The ServiceNow Compliance App · Date Code: 2026-07-12 15:00 ET</a:t>
+              <a:t>The ServiceNow Compliance App · Date Code: 2026-07-14 11:56 ET</a:t>
             </a:r>
           </a:p>
         </p:txBody>
